--- a/dist/초2/수학/수와계산/초2_수학_수와계산_09_4단과8단.pptx
+++ b/dist/초2/수학/수와계산/초2_수학_수와계산_09_4단과8단.pptx
@@ -121,13 +121,13 @@
   <p:extLst>
     <p:ext uri="{521415D9-36F7-43E2-AB2F-B90AF26B5E84}">
       <p14:sectionLst xmlns:p14="http://schemas.microsoft.com/office/powerpoint/2010/main">
-        <p14:section name="도입" id="{e7c3f37c-a393-127e-d6d0-7ffe3195cb82}">
+        <p14:section name="도입" id="{e6248c53-afaa-1cc7-cf3c-031448e72cb2}">
           <p14:sldIdLst>
             <p14:sldId id="256"/>
             <p14:sldId id="257"/>
           </p14:sldIdLst>
         </p14:section>
-        <p14:section name="개념" id="{6f52f7f6-ced5-6e0d-b64e-44dd6f1cf2ad}">
+        <p14:section name="개념" id="{3028ed11-d974-d610-51d4-23d3332b6814}">
           <p14:sldIdLst>
             <p14:sldId id="258"/>
             <p14:sldId id="259"/>
@@ -137,25 +137,25 @@
             <p14:sldId id="263"/>
           </p14:sldIdLst>
         </p14:section>
-        <p14:section name="연습" id="{ca01e58e-b054-e111-5e01-8059c2f3b439}">
+        <p14:section name="연습" id="{ab3db923-d080-f656-77b2-268048e73ce2}">
           <p14:sldIdLst>
             <p14:sldId id="264"/>
             <p14:sldId id="265"/>
           </p14:sldIdLst>
         </p14:section>
-        <p14:section name="확인" id="{5b3cd064-82d5-7a59-df23-d36f2576ed6c}">
+        <p14:section name="확인" id="{c6d4151a-e33f-9b60-f0ba-cb7e6fcb4854}">
           <p14:sldIdLst>
             <p14:sldId id="266"/>
             <p14:sldId id="267"/>
             <p14:sldId id="268"/>
           </p14:sldIdLst>
         </p14:section>
-        <p14:section name="정리" id="{659d59fd-7c47-8f37-c048-f2926a8c1ead}">
+        <p14:section name="정리" id="{06570895-78ba-c87f-00af-2a09ea3e8246}">
           <p14:sldIdLst>
             <p14:sldId id="269"/>
           </p14:sldIdLst>
         </p14:section>
-        <p14:section name="보충" id="{8a00a6bb-2d76-bee5-1ca3-1488c5e92b80}">
+        <p14:section name="보충" id="{fc74ceed-1ed0-710d-527d-77e5e7b1f6f1}">
           <p14:sldIdLst>
             <p14:sldId id="270"/>
           </p14:sldIdLst>

--- a/dist/초2/수학/수와계산/초2_수학_수와계산_09_4단과8단.pptx
+++ b/dist/초2/수학/수와계산/초2_수학_수와계산_09_4단과8단.pptx
@@ -121,13 +121,13 @@
   <p:extLst>
     <p:ext uri="{521415D9-36F7-43E2-AB2F-B90AF26B5E84}">
       <p14:sectionLst xmlns:p14="http://schemas.microsoft.com/office/powerpoint/2010/main">
-        <p14:section name="도입" id="{e6248c53-afaa-1cc7-cf3c-031448e72cb2}">
+        <p14:section name="도입" id="{6b49866f-070e-4c26-ee40-a81923551309}">
           <p14:sldIdLst>
             <p14:sldId id="256"/>
             <p14:sldId id="257"/>
           </p14:sldIdLst>
         </p14:section>
-        <p14:section name="개념" id="{3028ed11-d974-d610-51d4-23d3332b6814}">
+        <p14:section name="개념" id="{4e54a7ed-05ff-9dd7-ac96-be86b1c7aefd}">
           <p14:sldIdLst>
             <p14:sldId id="258"/>
             <p14:sldId id="259"/>
@@ -137,25 +137,25 @@
             <p14:sldId id="263"/>
           </p14:sldIdLst>
         </p14:section>
-        <p14:section name="연습" id="{ab3db923-d080-f656-77b2-268048e73ce2}">
+        <p14:section name="연습" id="{d6eb2c11-32d7-91e8-24f4-5ad76bb50d58}">
           <p14:sldIdLst>
             <p14:sldId id="264"/>
             <p14:sldId id="265"/>
           </p14:sldIdLst>
         </p14:section>
-        <p14:section name="확인" id="{c6d4151a-e33f-9b60-f0ba-cb7e6fcb4854}">
+        <p14:section name="확인" id="{cc4f6a4e-c587-a9f4-2b5b-c8363f8caf18}">
           <p14:sldIdLst>
             <p14:sldId id="266"/>
             <p14:sldId id="267"/>
             <p14:sldId id="268"/>
           </p14:sldIdLst>
         </p14:section>
-        <p14:section name="정리" id="{06570895-78ba-c87f-00af-2a09ea3e8246}">
+        <p14:section name="정리" id="{0705924e-1030-f19f-b4df-73954ce339d1}">
           <p14:sldIdLst>
             <p14:sldId id="269"/>
           </p14:sldIdLst>
         </p14:section>
-        <p14:section name="보충" id="{fc74ceed-1ed0-710d-527d-77e5e7b1f6f1}">
+        <p14:section name="보충" id="{36a5ffc5-3c49-cecd-9506-8f1cc6cd81a0}">
           <p14:sldIdLst>
             <p14:sldId id="270"/>
           </p14:sldIdLst>
@@ -12872,7 +12872,7 @@
           </p:nvPr>
         </p:nvGraphicFramePr>
         <p:xfrm>
-          <a:off x="548640" y="3037840"/>
+          <a:off x="548640" y="3054350"/>
           <a:ext cx="11091672" cy="914400"/>
         </p:xfrm>
         <a:graphic>
@@ -12890,7 +12890,7 @@
                 <a:gridCol w="1232408"/>
                 <a:gridCol w="1232408"/>
               </a:tblGrid>
-              <a:tr h="528320">
+              <a:tr h="511810">
                 <a:tc>
                   <a:txBody>
                     <a:bodyPr/>
@@ -13504,7 +13504,7 @@
                   </a:tcPr>
                 </a:tc>
               </a:tr>
-              <a:tr h="528320">
+              <a:tr h="511810">
                 <a:tc>
                   <a:txBody>
                     <a:bodyPr/>
@@ -17551,7 +17551,7 @@
           </p:nvPr>
         </p:nvGraphicFramePr>
         <p:xfrm>
-          <a:off x="548640" y="2773680"/>
+          <a:off x="548640" y="2798445"/>
           <a:ext cx="11091672" cy="914400"/>
         </p:xfrm>
         <a:graphic>
@@ -17570,7 +17570,7 @@
                 <a:gridCol w="1109167"/>
                 <a:gridCol w="1109167"/>
               </a:tblGrid>
-              <a:tr h="528320">
+              <a:tr h="511810">
                 <a:tc>
                   <a:txBody>
                     <a:bodyPr/>
@@ -18252,7 +18252,7 @@
                   </a:tcPr>
                 </a:tc>
               </a:tr>
-              <a:tr h="528320">
+              <a:tr h="511810">
                 <a:tc>
                   <a:txBody>
                     <a:bodyPr/>
@@ -18934,7 +18934,7 @@
                   </a:tcPr>
                 </a:tc>
               </a:tr>
-              <a:tr h="528320">
+              <a:tr h="511810">
                 <a:tc>
                   <a:txBody>
                     <a:bodyPr/>
